--- a/AegisOps_Disaster_Coordination_Pitch.pptx
+++ b/AegisOps_Disaster_Coordination_Pitch.pptx
@@ -3437,7 +3437,7 @@
               </a:defRPr>
             </a:pPr>
             <a:r>
-              <a:t>GitHub Repository: https://github.com/vanguard-rescue/aegisops</a:t>
+              <a:t>GitHub Repository: https://github.com/ujwal-naik/aegisops</a:t>
             </a:r>
           </a:p>
           <a:p>
